--- a/docs/northwind-value-playback.pptx
+++ b/docs/northwind-value-playback.pptx
@@ -12029,7 +12029,7 @@
                 <a:ea typeface="Arial" pitchFamily="34" charset="-122"/>
                 <a:cs typeface="Arial" pitchFamily="34" charset="-120"/>
               </a:rPr>
-              <a:t>The full decision log is in the repository. These are the points that matter for production.</a:t>
+              <a:t>Key design decisions, trade-offs and risks to validate before production.</a:t>
             </a:r>
             <a:endParaRPr lang="en-US" sz="1200" dirty="0"/>
           </a:p>
